--- a/submission/NEE/figures_polished/Fig4.pptx
+++ b/submission/NEE/figures_polished/Fig4.pptx
@@ -3609,8 +3609,8 @@
         </p:nvSpPr>
         <p:spPr>
           <a:xfrm flipV="1">
-            <a:off x="1271160" y="609840"/>
-            <a:ext cx="0" cy="883080"/>
+            <a:off x="1271160" y="608400"/>
+            <a:ext cx="0" cy="884520"/>
           </a:xfrm>
           <a:prstGeom prst="line">
             <a:avLst/>
@@ -3652,8 +3652,8 @@
         </p:nvSpPr>
         <p:spPr>
           <a:xfrm flipV="1">
-            <a:off x="1271160" y="868320"/>
-            <a:ext cx="624960" cy="624960"/>
+            <a:off x="1271160" y="867600"/>
+            <a:ext cx="626040" cy="625680"/>
           </a:xfrm>
           <a:prstGeom prst="line">
             <a:avLst/>
@@ -3696,7 +3696,7 @@
         <p:spPr>
           <a:xfrm>
             <a:off x="1271160" y="1492920"/>
-            <a:ext cx="883080" cy="0"/>
+            <a:ext cx="884520" cy="0"/>
           </a:xfrm>
           <a:prstGeom prst="line">
             <a:avLst/>
@@ -3739,7 +3739,7 @@
         <p:spPr>
           <a:xfrm>
             <a:off x="1271160" y="1492920"/>
-            <a:ext cx="624960" cy="624600"/>
+            <a:ext cx="626040" cy="625680"/>
           </a:xfrm>
           <a:prstGeom prst="line">
             <a:avLst/>
@@ -3782,7 +3782,7 @@
         <p:spPr>
           <a:xfrm>
             <a:off x="1271160" y="1492920"/>
-            <a:ext cx="0" cy="883080"/>
+            <a:ext cx="0" cy="884160"/>
           </a:xfrm>
           <a:prstGeom prst="line">
             <a:avLst/>
@@ -3824,8 +3824,8 @@
         </p:nvSpPr>
         <p:spPr>
           <a:xfrm flipH="1">
-            <a:off x="646920" y="1492920"/>
-            <a:ext cx="624600" cy="624600"/>
+            <a:off x="645840" y="1492920"/>
+            <a:ext cx="625680" cy="625680"/>
           </a:xfrm>
           <a:prstGeom prst="line">
             <a:avLst/>
@@ -3867,8 +3867,8 @@
         </p:nvSpPr>
         <p:spPr>
           <a:xfrm flipH="1">
-            <a:off x="388440" y="1492920"/>
-            <a:ext cx="882720" cy="0"/>
+            <a:off x="387000" y="1492920"/>
+            <a:ext cx="884160" cy="0"/>
           </a:xfrm>
           <a:prstGeom prst="line">
             <a:avLst/>
@@ -3910,8 +3910,8 @@
         </p:nvSpPr>
         <p:spPr>
           <a:xfrm flipH="1" flipV="1">
-            <a:off x="646920" y="868320"/>
-            <a:ext cx="624600" cy="624960"/>
+            <a:off x="645840" y="867600"/>
+            <a:ext cx="625680" cy="625680"/>
           </a:xfrm>
           <a:prstGeom prst="line">
             <a:avLst/>
@@ -4025,8 +4025,8 @@
         </p:nvSpPr>
         <p:spPr>
           <a:xfrm>
-            <a:off x="1161720" y="1154160"/>
-            <a:ext cx="935280" cy="482040"/>
+            <a:off x="1161000" y="1157040"/>
+            <a:ext cx="937080" cy="479880"/>
           </a:xfrm>
           <a:custGeom>
             <a:avLst/>
@@ -4034,33 +4034,33 @@
             <a:ahLst/>
             <a:rect l="0" t="0" r="r" b="b"/>
             <a:pathLst>
-              <a:path fill="none" w="2598" h="1339">
+              <a:path fill="none" w="2603" h="1333">
                 <a:moveTo>
-                  <a:pt x="304" y="585"/>
+                  <a:pt x="306" y="576"/>
                 </a:moveTo>
                 <a:lnTo>
-                  <a:pt x="1246" y="0"/>
-                </a:lnTo>
-                <a:lnTo>
-                  <a:pt x="2598" y="942"/>
-                </a:lnTo>
-                <a:lnTo>
-                  <a:pt x="703" y="1339"/>
-                </a:lnTo>
-                <a:lnTo>
-                  <a:pt x="304" y="1221"/>
-                </a:lnTo>
-                <a:lnTo>
-                  <a:pt x="0" y="1246"/>
-                </a:lnTo>
-                <a:lnTo>
-                  <a:pt x="133" y="942"/>
-                </a:lnTo>
-                <a:lnTo>
-                  <a:pt x="195" y="832"/>
-                </a:lnTo>
-                <a:lnTo>
-                  <a:pt x="304" y="585"/>
+                  <a:pt x="1240" y="0"/>
+                </a:lnTo>
+                <a:lnTo>
+                  <a:pt x="2603" y="934"/>
+                </a:lnTo>
+                <a:lnTo>
+                  <a:pt x="707" y="1333"/>
+                </a:lnTo>
+                <a:lnTo>
+                  <a:pt x="306" y="1215"/>
+                </a:lnTo>
+                <a:lnTo>
+                  <a:pt x="0" y="1240"/>
+                </a:lnTo>
+                <a:lnTo>
+                  <a:pt x="135" y="934"/>
+                </a:lnTo>
+                <a:lnTo>
+                  <a:pt x="197" y="825"/>
+                </a:lnTo>
+                <a:lnTo>
+                  <a:pt x="306" y="576"/>
                 </a:lnTo>
               </a:path>
             </a:pathLst>
@@ -4244,7 +4244,7 @@
         </p:nvSpPr>
         <p:spPr>
           <a:xfrm>
-            <a:off x="1245960" y="501840"/>
+            <a:off x="1245960" y="500400"/>
             <a:ext cx="75960" cy="86040"/>
           </a:xfrm>
           <a:prstGeom prst="rect">
@@ -4292,7 +4292,7 @@
         </p:nvSpPr>
         <p:spPr>
           <a:xfrm>
-            <a:off x="1903680" y="779040"/>
+            <a:off x="1904760" y="777960"/>
             <a:ext cx="106560" cy="86040"/>
           </a:xfrm>
           <a:prstGeom prst="rect">
@@ -4340,7 +4340,7 @@
         </p:nvSpPr>
         <p:spPr>
           <a:xfrm>
-            <a:off x="2186640" y="1448640"/>
+            <a:off x="2188080" y="1448640"/>
             <a:ext cx="75960" cy="86040"/>
           </a:xfrm>
           <a:prstGeom prst="rect">
@@ -4388,7 +4388,7 @@
         </p:nvSpPr>
         <p:spPr>
           <a:xfrm>
-            <a:off x="1903680" y="2118240"/>
+            <a:off x="1904760" y="2118960"/>
             <a:ext cx="102240" cy="86040"/>
           </a:xfrm>
           <a:prstGeom prst="rect">
@@ -4436,7 +4436,7 @@
         </p:nvSpPr>
         <p:spPr>
           <a:xfrm>
-            <a:off x="1245960" y="2395440"/>
+            <a:off x="1245960" y="2396880"/>
             <a:ext cx="75960" cy="86040"/>
           </a:xfrm>
           <a:prstGeom prst="rect">
@@ -4484,7 +4484,7 @@
         </p:nvSpPr>
         <p:spPr>
           <a:xfrm>
-            <a:off x="515880" y="2118240"/>
+            <a:off x="515160" y="2118960"/>
             <a:ext cx="123480" cy="86040"/>
           </a:xfrm>
           <a:prstGeom prst="rect">
@@ -4532,7 +4532,7 @@
         </p:nvSpPr>
         <p:spPr>
           <a:xfrm>
-            <a:off x="280080" y="1448640"/>
+            <a:off x="278640" y="1448640"/>
             <a:ext cx="75960" cy="86040"/>
           </a:xfrm>
           <a:prstGeom prst="rect">
@@ -4580,7 +4580,7 @@
         </p:nvSpPr>
         <p:spPr>
           <a:xfrm>
-            <a:off x="515880" y="779040"/>
+            <a:off x="515160" y="777960"/>
             <a:ext cx="127800" cy="86040"/>
           </a:xfrm>
           <a:prstGeom prst="rect">
@@ -5874,8 +5874,8 @@
         </p:nvSpPr>
         <p:spPr>
           <a:xfrm>
-            <a:off x="3153960" y="1044360"/>
-            <a:ext cx="90360" cy="718200"/>
+            <a:off x="3153960" y="988560"/>
+            <a:ext cx="90360" cy="779400"/>
           </a:xfrm>
           <a:custGeom>
             <a:avLst/>
@@ -5883,7 +5883,7 @@
             <a:ahLst/>
             <a:rect l="0" t="0" r="r" b="b"/>
             <a:pathLst>
-              <a:path w="251" h="1995">
+              <a:path w="251" h="2165">
                 <a:moveTo>
                   <a:pt x="0" y="0"/>
                 </a:moveTo>
@@ -5891,10 +5891,10 @@
                   <a:pt x="251" y="0"/>
                 </a:lnTo>
                 <a:lnTo>
-                  <a:pt x="251" y="1995"/>
-                </a:lnTo>
-                <a:lnTo>
-                  <a:pt x="0" y="1995"/>
+                  <a:pt x="251" y="2165"/>
+                </a:lnTo>
+                <a:lnTo>
+                  <a:pt x="0" y="2165"/>
                 </a:lnTo>
                 <a:lnTo>
                   <a:pt x="0" y="0"/>
@@ -5934,8 +5934,8 @@
         </p:nvSpPr>
         <p:spPr>
           <a:xfrm>
-            <a:off x="3602520" y="1204560"/>
-            <a:ext cx="90000" cy="313920"/>
+            <a:off x="3602520" y="1200240"/>
+            <a:ext cx="90000" cy="339120"/>
           </a:xfrm>
           <a:custGeom>
             <a:avLst/>
@@ -5943,7 +5943,7 @@
             <a:ahLst/>
             <a:rect l="0" t="0" r="r" b="b"/>
             <a:pathLst>
-              <a:path w="250" h="872">
+              <a:path w="250" h="942">
                 <a:moveTo>
                   <a:pt x="0" y="0"/>
                 </a:moveTo>
@@ -5951,10 +5951,10 @@
                   <a:pt x="250" y="0"/>
                 </a:lnTo>
                 <a:lnTo>
-                  <a:pt x="250" y="872"/>
-                </a:lnTo>
-                <a:lnTo>
-                  <a:pt x="0" y="872"/>
+                  <a:pt x="250" y="942"/>
+                </a:lnTo>
+                <a:lnTo>
+                  <a:pt x="0" y="942"/>
                 </a:lnTo>
                 <a:lnTo>
                   <a:pt x="0" y="0"/>
@@ -5994,8 +5994,8 @@
         </p:nvSpPr>
         <p:spPr>
           <a:xfrm>
-            <a:off x="4050720" y="1255680"/>
-            <a:ext cx="90000" cy="219600"/>
+            <a:off x="4050720" y="1252440"/>
+            <a:ext cx="90000" cy="212400"/>
           </a:xfrm>
           <a:custGeom>
             <a:avLst/>
@@ -6003,7 +6003,7 @@
             <a:ahLst/>
             <a:rect l="0" t="0" r="r" b="b"/>
             <a:pathLst>
-              <a:path w="250" h="610">
+              <a:path w="250" h="590">
                 <a:moveTo>
                   <a:pt x="0" y="0"/>
                 </a:moveTo>
@@ -6011,10 +6011,10 @@
                   <a:pt x="250" y="0"/>
                 </a:lnTo>
                 <a:lnTo>
-                  <a:pt x="250" y="610"/>
-                </a:lnTo>
-                <a:lnTo>
-                  <a:pt x="0" y="610"/>
+                  <a:pt x="250" y="590"/>
+                </a:lnTo>
+                <a:lnTo>
+                  <a:pt x="0" y="590"/>
                 </a:lnTo>
                 <a:lnTo>
                   <a:pt x="0" y="0"/>
@@ -6054,8 +6054,8 @@
         </p:nvSpPr>
         <p:spPr>
           <a:xfrm>
-            <a:off x="4499280" y="1123200"/>
-            <a:ext cx="90000" cy="558360"/>
+            <a:off x="4499280" y="1110960"/>
+            <a:ext cx="90000" cy="548640"/>
           </a:xfrm>
           <a:custGeom>
             <a:avLst/>
@@ -6063,7 +6063,7 @@
             <a:ahLst/>
             <a:rect l="0" t="0" r="r" b="b"/>
             <a:pathLst>
-              <a:path w="250" h="1551">
+              <a:path w="250" h="1524">
                 <a:moveTo>
                   <a:pt x="0" y="0"/>
                 </a:moveTo>
@@ -6071,10 +6071,10 @@
                   <a:pt x="250" y="0"/>
                 </a:lnTo>
                 <a:lnTo>
-                  <a:pt x="250" y="1551"/>
-                </a:lnTo>
-                <a:lnTo>
-                  <a:pt x="0" y="1551"/>
+                  <a:pt x="250" y="1524"/>
+                </a:lnTo>
+                <a:lnTo>
+                  <a:pt x="0" y="1524"/>
                 </a:lnTo>
                 <a:lnTo>
                   <a:pt x="0" y="0"/>
@@ -6114,7 +6114,7 @@
         </p:nvSpPr>
         <p:spPr>
           <a:xfrm>
-            <a:off x="4947480" y="1009800"/>
+            <a:off x="4947480" y="1022400"/>
             <a:ext cx="90000" cy="820080"/>
           </a:xfrm>
           <a:custGeom>
@@ -6174,8 +6174,8 @@
         </p:nvSpPr>
         <p:spPr>
           <a:xfrm>
-            <a:off x="5396040" y="1108800"/>
-            <a:ext cx="90000" cy="519480"/>
+            <a:off x="5396040" y="1092960"/>
+            <a:ext cx="90000" cy="545760"/>
           </a:xfrm>
           <a:custGeom>
             <a:avLst/>
@@ -6183,7 +6183,7 @@
             <a:ahLst/>
             <a:rect l="0" t="0" r="r" b="b"/>
             <a:pathLst>
-              <a:path w="250" h="1443">
+              <a:path w="250" h="1516">
                 <a:moveTo>
                   <a:pt x="0" y="0"/>
                 </a:moveTo>
@@ -6191,10 +6191,10 @@
                   <a:pt x="250" y="0"/>
                 </a:lnTo>
                 <a:lnTo>
-                  <a:pt x="250" y="1443"/>
-                </a:lnTo>
-                <a:lnTo>
-                  <a:pt x="0" y="1443"/>
+                  <a:pt x="250" y="1516"/>
+                </a:lnTo>
+                <a:lnTo>
+                  <a:pt x="0" y="1516"/>
                 </a:lnTo>
                 <a:lnTo>
                   <a:pt x="0" y="0"/>
@@ -6234,8 +6234,8 @@
         </p:nvSpPr>
         <p:spPr>
           <a:xfrm>
-            <a:off x="5844240" y="857520"/>
-            <a:ext cx="90000" cy="1301400"/>
+            <a:off x="5844240" y="799200"/>
+            <a:ext cx="90000" cy="1360080"/>
           </a:xfrm>
           <a:custGeom>
             <a:avLst/>
@@ -6243,7 +6243,7 @@
             <a:ahLst/>
             <a:rect l="0" t="0" r="r" b="b"/>
             <a:pathLst>
-              <a:path w="250" h="3615">
+              <a:path w="250" h="3778">
                 <a:moveTo>
                   <a:pt x="0" y="0"/>
                 </a:moveTo>
@@ -6251,10 +6251,10 @@
                   <a:pt x="250" y="0"/>
                 </a:lnTo>
                 <a:lnTo>
-                  <a:pt x="250" y="3615"/>
-                </a:lnTo>
-                <a:lnTo>
-                  <a:pt x="0" y="3615"/>
+                  <a:pt x="250" y="3778"/>
+                </a:lnTo>
+                <a:lnTo>
+                  <a:pt x="0" y="3778"/>
                 </a:lnTo>
                 <a:lnTo>
                   <a:pt x="0" y="0"/>
@@ -6294,8 +6294,8 @@
         </p:nvSpPr>
         <p:spPr>
           <a:xfrm>
-            <a:off x="6292440" y="760320"/>
-            <a:ext cx="90000" cy="1380600"/>
+            <a:off x="6292440" y="749520"/>
+            <a:ext cx="90000" cy="1533600"/>
           </a:xfrm>
           <a:custGeom>
             <a:avLst/>
@@ -6303,7 +6303,7 @@
             <a:ahLst/>
             <a:rect l="0" t="0" r="r" b="b"/>
             <a:pathLst>
-              <a:path w="250" h="3835">
+              <a:path w="250" h="4260">
                 <a:moveTo>
                   <a:pt x="0" y="0"/>
                 </a:moveTo>
@@ -6311,10 +6311,10 @@
                   <a:pt x="250" y="0"/>
                 </a:lnTo>
                 <a:lnTo>
-                  <a:pt x="250" y="3835"/>
-                </a:lnTo>
-                <a:lnTo>
-                  <a:pt x="0" y="3835"/>
+                  <a:pt x="250" y="4260"/>
+                </a:lnTo>
+                <a:lnTo>
+                  <a:pt x="0" y="4260"/>
                 </a:lnTo>
                 <a:lnTo>
                   <a:pt x="0" y="0"/>
@@ -7274,7 +7274,7 @@
         </p:nvSpPr>
         <p:spPr>
           <a:xfrm>
-            <a:off x="3171600" y="1083960"/>
+            <a:off x="3171600" y="1089720"/>
             <a:ext cx="55440" cy="55440"/>
           </a:xfrm>
           <a:custGeom>
@@ -7332,7 +7332,7 @@
         </p:nvSpPr>
         <p:spPr>
           <a:xfrm>
-            <a:off x="3171600" y="1083960"/>
+            <a:off x="3171600" y="1089720"/>
             <a:ext cx="55440" cy="55440"/>
           </a:xfrm>
           <a:custGeom>
@@ -7389,8 +7389,8 @@
         </p:nvSpPr>
         <p:spPr>
           <a:xfrm>
-            <a:off x="3619800" y="1084680"/>
-            <a:ext cx="55440" cy="55440"/>
+            <a:off x="3619800" y="1070640"/>
+            <a:ext cx="55440" cy="55800"/>
           </a:xfrm>
           <a:custGeom>
             <a:avLst/>
@@ -7398,13 +7398,13 @@
             <a:ahLst/>
             <a:rect l="0" t="0" r="r" b="b"/>
             <a:pathLst>
-              <a:path w="154" h="154">
+              <a:path w="154" h="155">
                 <a:moveTo>
                   <a:pt x="0" y="77"/>
                 </a:moveTo>
                 <a:cubicBezTo>
-                  <a:pt x="0" y="-25"/>
-                  <a:pt x="154" y="-25"/>
+                  <a:pt x="0" y="-26"/>
+                  <a:pt x="154" y="-26"/>
                   <a:pt x="154" y="77"/>
                 </a:cubicBezTo>
                 <a:cubicBezTo>
@@ -7447,8 +7447,8 @@
         </p:nvSpPr>
         <p:spPr>
           <a:xfrm>
-            <a:off x="3619800" y="1084680"/>
-            <a:ext cx="55440" cy="55440"/>
+            <a:off x="3619800" y="1070640"/>
+            <a:ext cx="55440" cy="55800"/>
           </a:xfrm>
           <a:custGeom>
             <a:avLst/>
@@ -7456,7 +7456,7 @@
             <a:ahLst/>
             <a:rect l="0" t="0" r="r" b="b"/>
             <a:pathLst>
-              <a:path fill="none" w="154" h="154">
+              <a:path fill="none" w="154" h="155">
                 <a:moveTo>
                   <a:pt x="154" y="77"/>
                 </a:moveTo>
@@ -7466,8 +7466,8 @@
                   <a:pt x="0" y="77"/>
                 </a:cubicBezTo>
                 <a:cubicBezTo>
-                  <a:pt x="0" y="-25"/>
-                  <a:pt x="154" y="-25"/>
+                  <a:pt x="0" y="-26"/>
+                  <a:pt x="154" y="-26"/>
                   <a:pt x="154" y="77"/>
                 </a:cubicBezTo>
               </a:path>
@@ -7504,7 +7504,7 @@
         </p:nvSpPr>
         <p:spPr>
           <a:xfrm>
-            <a:off x="4068000" y="1507320"/>
+            <a:off x="4068000" y="1509480"/>
             <a:ext cx="55440" cy="55800"/>
           </a:xfrm>
           <a:custGeom>
@@ -7562,7 +7562,7 @@
         </p:nvSpPr>
         <p:spPr>
           <a:xfrm>
-            <a:off x="4068000" y="1507320"/>
+            <a:off x="4068000" y="1509480"/>
             <a:ext cx="55440" cy="55800"/>
           </a:xfrm>
           <a:custGeom>
@@ -7619,7 +7619,7 @@
         </p:nvSpPr>
         <p:spPr>
           <a:xfrm>
-            <a:off x="4516560" y="1684440"/>
+            <a:off x="4516560" y="1692360"/>
             <a:ext cx="55440" cy="55440"/>
           </a:xfrm>
           <a:custGeom>
@@ -7677,7 +7677,7 @@
         </p:nvSpPr>
         <p:spPr>
           <a:xfrm>
-            <a:off x="4516560" y="1684440"/>
+            <a:off x="4516560" y="1692360"/>
             <a:ext cx="55440" cy="55440"/>
           </a:xfrm>
           <a:custGeom>
@@ -7734,8 +7734,8 @@
         </p:nvSpPr>
         <p:spPr>
           <a:xfrm>
-            <a:off x="4964760" y="2094480"/>
-            <a:ext cx="55440" cy="55440"/>
+            <a:off x="4964760" y="2107080"/>
+            <a:ext cx="55440" cy="55800"/>
           </a:xfrm>
           <a:custGeom>
             <a:avLst/>
@@ -7743,7 +7743,7 @@
             <a:ahLst/>
             <a:rect l="0" t="0" r="r" b="b"/>
             <a:pathLst>
-              <a:path w="154" h="154">
+              <a:path w="154" h="155">
                 <a:moveTo>
                   <a:pt x="0" y="77"/>
                 </a:moveTo>
@@ -7753,8 +7753,8 @@
                   <a:pt x="154" y="77"/>
                 </a:cubicBezTo>
                 <a:cubicBezTo>
-                  <a:pt x="154" y="179"/>
-                  <a:pt x="0" y="179"/>
+                  <a:pt x="154" y="180"/>
+                  <a:pt x="0" y="180"/>
                   <a:pt x="0" y="77"/>
                 </a:cubicBezTo>
                 <a:close/>
@@ -7762,7 +7762,7 @@
             </a:pathLst>
           </a:custGeom>
           <a:solidFill>
-            <a:srgbClr val="1F5F9E"/>
+            <a:srgbClr val="FFFFFF"/>
           </a:solidFill>
           <a:ln w="0">
             <a:noFill/>
@@ -7775,7 +7775,7 @@
           <a:p>
             <a:endParaRPr lang="en-US" sz="2400" b="0" u="none" strike="noStrike">
               <a:solidFill>
-                <a:srgbClr val="FFFFFF"/>
+                <a:srgbClr val="000000"/>
               </a:solidFill>
               <a:effectLst/>
               <a:uFillTx/>
@@ -7792,8 +7792,8 @@
         </p:nvSpPr>
         <p:spPr>
           <a:xfrm>
-            <a:off x="4964760" y="2094480"/>
-            <a:ext cx="55440" cy="55440"/>
+            <a:off x="4964760" y="2107080"/>
+            <a:ext cx="55440" cy="55800"/>
           </a:xfrm>
           <a:custGeom>
             <a:avLst/>
@@ -7801,13 +7801,13 @@
             <a:ahLst/>
             <a:rect l="0" t="0" r="r" b="b"/>
             <a:pathLst>
-              <a:path fill="none" w="154" h="154">
+              <a:path fill="none" w="154" h="155">
                 <a:moveTo>
                   <a:pt x="154" y="77"/>
                 </a:moveTo>
                 <a:cubicBezTo>
-                  <a:pt x="154" y="179"/>
-                  <a:pt x="0" y="179"/>
+                  <a:pt x="154" y="180"/>
+                  <a:pt x="0" y="180"/>
                   <a:pt x="0" y="77"/>
                 </a:cubicBezTo>
                 <a:cubicBezTo>
@@ -7849,7 +7849,7 @@
         </p:nvSpPr>
         <p:spPr>
           <a:xfrm>
-            <a:off x="5413320" y="1139040"/>
+            <a:off x="5413320" y="1149120"/>
             <a:ext cx="55440" cy="55440"/>
           </a:xfrm>
           <a:custGeom>
@@ -7863,13 +7863,13 @@
                   <a:pt x="0" y="77"/>
                 </a:moveTo>
                 <a:cubicBezTo>
-                  <a:pt x="0" y="-25"/>
-                  <a:pt x="154" y="-25"/>
+                  <a:pt x="0" y="-26"/>
+                  <a:pt x="154" y="-26"/>
                   <a:pt x="154" y="77"/>
                 </a:cubicBezTo>
                 <a:cubicBezTo>
-                  <a:pt x="154" y="180"/>
-                  <a:pt x="0" y="180"/>
+                  <a:pt x="154" y="179"/>
+                  <a:pt x="0" y="179"/>
                   <a:pt x="0" y="77"/>
                 </a:cubicBezTo>
                 <a:close/>
@@ -7907,7 +7907,7 @@
         </p:nvSpPr>
         <p:spPr>
           <a:xfrm>
-            <a:off x="5413320" y="1139040"/>
+            <a:off x="5413320" y="1149120"/>
             <a:ext cx="55440" cy="55440"/>
           </a:xfrm>
           <a:custGeom>
@@ -7921,13 +7921,13 @@
                   <a:pt x="154" y="77"/>
                 </a:moveTo>
                 <a:cubicBezTo>
-                  <a:pt x="154" y="180"/>
-                  <a:pt x="0" y="180"/>
+                  <a:pt x="154" y="179"/>
+                  <a:pt x="0" y="179"/>
                   <a:pt x="0" y="77"/>
                 </a:cubicBezTo>
                 <a:cubicBezTo>
-                  <a:pt x="0" y="-25"/>
-                  <a:pt x="154" y="-25"/>
+                  <a:pt x="0" y="-26"/>
+                  <a:pt x="154" y="-26"/>
                   <a:pt x="154" y="77"/>
                 </a:cubicBezTo>
               </a:path>
@@ -8079,7 +8079,7 @@
         </p:nvSpPr>
         <p:spPr>
           <a:xfrm>
-            <a:off x="6309720" y="450720"/>
+            <a:off x="6309720" y="439560"/>
             <a:ext cx="55440" cy="55440"/>
           </a:xfrm>
           <a:custGeom>
@@ -8137,7 +8137,7 @@
         </p:nvSpPr>
         <p:spPr>
           <a:xfrm>
-            <a:off x="6309720" y="450720"/>
+            <a:off x="6309720" y="439560"/>
             <a:ext cx="55440" cy="55440"/>
           </a:xfrm>
           <a:custGeom>
@@ -8921,7 +8921,7 @@
                 <a:latin typeface="Arial"/>
                 <a:ea typeface="Arial"/>
               </a:rPr>
-              <a:t>Geometry + effort:  χ² = 25.8,  </a:t>
+              <a:t>Geometry + effort:  χ² = 26.8,  </a:t>
             </a:r>
             <a:r>
               <a:rPr lang="en-US" sz="600" b="0" i="1" u="none" strike="noStrike">
@@ -9264,7 +9264,7 @@
                 <a:latin typeface="Arial"/>
                 <a:ea typeface="Arial"/>
               </a:rPr>
-              <a:t>Geometry + effort 33.0%</a:t>
+              <a:t>Geometry + effort 32.8%</a:t>
             </a:r>
             <a:endParaRPr lang="en-US" sz="600" b="0" u="none" strike="noStrike">
               <a:solidFill>
